--- a/PI_MPower_VideoStabilizer.pptx
+++ b/PI_MPower_VideoStabilizer.pptx
@@ -4859,7 +4859,7 @@
 </file>
 
 <file path=ppt/slides/slide1.xml><?xml version="1.0" encoding="utf-8"?>
-<p:sld xmlns:a="http://schemas.openxmlformats.org/drawingml/2006/main" xmlns:r="http://schemas.openxmlformats.org/officeDocument/2006/relationships" xmlns:p="http://schemas.openxmlformats.org/presentationml/2006/main">
+<p:sld xmlns:a="http://schemas.openxmlformats.org/drawingml/2006/main" xmlns:r="http://schemas.openxmlformats.org/officeDocument/2006/relationships" xmlns:p="http://schemas.openxmlformats.org/presentationml/2006/main" show="0">
   <p:cSld>
     <p:spTree>
       <p:nvGrpSpPr>
@@ -5122,7 +5122,7 @@
         </p:nvSpPr>
         <p:spPr>
           <a:xfrm>
-            <a:off x="15133638" y="39049741"/>
+            <a:off x="15128874" y="39509148"/>
             <a:ext cx="13452122" cy="2852949"/>
           </a:xfrm>
           <a:prstGeom prst="rect">
@@ -5137,52 +5137,45 @@
           <a:lstStyle/>
           <a:p>
             <a:r>
-              <a:rPr lang="en-US" b="1" noProof="1"/>
-              <a:t>Referințe (selectiv, în format scurt):</a:t>
-            </a:r>
-            <a:endParaRPr lang="en-US" noProof="1"/>
-          </a:p>
-          <a:p>
-            <a:r>
-              <a:rPr lang="en-US" b="1" noProof="1"/>
-              <a:t>[1] OpenCV Documentation – Feature Detection &amp; Description.</a:t>
-            </a:r>
-            <a:endParaRPr lang="en-US" noProof="1"/>
-          </a:p>
-          <a:p>
-            <a:r>
-              <a:rPr lang="en-US" b="1" noProof="1"/>
-              <a:t>[2] Rublee et al., ORB: An Efficient Alternative to SIFT or SURF, ICCV 2011.</a:t>
-            </a:r>
-            <a:endParaRPr lang="en-US" noProof="1"/>
-          </a:p>
-          <a:p>
-            <a:r>
-              <a:rPr lang="en-US" b="1" noProof="1"/>
-              <a:t>[3] Lowe, Distinctive Image Features from Scale-Invariant Keypoints, IJCV 2004.</a:t>
-            </a:r>
-            <a:endParaRPr lang="en-US" noProof="1"/>
-          </a:p>
-          <a:p>
-            <a:r>
-              <a:rPr lang="en-US" b="1" noProof="1"/>
-              <a:t>[4] Fischler &amp; Bolles, Random Sample Consensus (RANSAC), CACM 1981.</a:t>
-            </a:r>
-            <a:endParaRPr lang="en-US" noProof="1"/>
-          </a:p>
-          <a:p>
-            <a:r>
-              <a:rPr lang="en-US" b="1" noProof="1"/>
-              <a:t>[5] Nghia Ho – Tutorial stabilizare video (concept de traiectorie + smoothing).</a:t>
-            </a:r>
-            <a:endParaRPr lang="en-US" noProof="1"/>
-          </a:p>
-          <a:p>
-            <a:r>
-              <a:rPr lang="en-US" b="1" noProof="1"/>
-              <a:t>[6] Lucas &amp; Kanade, Iterative Image Registration Technique, 1981 (pentru comparație).</a:t>
-            </a:r>
-            <a:endParaRPr lang="en-US" noProof="1"/>
+              <a:rPr lang="en-US" sz="2800" dirty="0"/>
+              <a:t>[1] Shi &amp; Tomasi, Good Features to Track, 1994.</a:t>
+            </a:r>
+            <a:br>
+              <a:rPr lang="en-US" sz="2800" dirty="0"/>
+            </a:br>
+            <a:r>
+              <a:rPr lang="en-US" sz="2800" dirty="0"/>
+              <a:t>[2] Lucas &amp; Kanade, Image Registration, 1981.</a:t>
+            </a:r>
+            <a:br>
+              <a:rPr lang="en-US" sz="2800" dirty="0"/>
+            </a:br>
+            <a:r>
+              <a:rPr lang="en-US" sz="2800" dirty="0"/>
+              <a:t>[3] Fischler &amp; Bolles, RANSAC, 1981.</a:t>
+            </a:r>
+            <a:br>
+              <a:rPr lang="en-US" sz="2800" dirty="0"/>
+            </a:br>
+            <a:r>
+              <a:rPr lang="en-US" sz="2800" dirty="0"/>
+              <a:t>[4] OpenCV Documentation (Video Stabilization &amp; Features).</a:t>
+            </a:r>
+            <a:br>
+              <a:rPr lang="en-US" sz="2800" dirty="0"/>
+            </a:br>
+            <a:r>
+              <a:rPr lang="en-US" sz="2800" dirty="0"/>
+              <a:t>[5] Nghia Ho – Tutorial Video Stabilization (concept trajectory smoothing).</a:t>
+            </a:r>
+            <a:br>
+              <a:rPr lang="en-US" sz="2800" dirty="0"/>
+            </a:br>
+            <a:r>
+              <a:rPr lang="en-US" sz="2800" dirty="0"/>
+              <a:t>[6] Rublee et al., ORB, ICCV 2011 </a:t>
+            </a:r>
+            <a:endParaRPr lang="en-US" sz="2800" noProof="1"/>
           </a:p>
         </p:txBody>
       </p:sp>
@@ -5194,8 +5187,8 @@
         </p:nvSpPr>
         <p:spPr>
           <a:xfrm>
-            <a:off x="15133638" y="37890733"/>
-            <a:ext cx="3325668" cy="918816"/>
+            <a:off x="15157978" y="38727272"/>
+            <a:ext cx="3452498" cy="918816"/>
           </a:xfrm>
           <a:prstGeom prst="rect">
             <a:avLst/>
@@ -5210,7 +5203,7 @@
           <a:p>
             <a:r>
               <a:rPr lang="en-US" sz="5400" b="1" noProof="1"/>
-              <a:t>References</a:t>
+              <a:t>Bibliografie</a:t>
             </a:r>
           </a:p>
         </p:txBody>
@@ -5359,7 +5352,7 @@
           <a:p>
             <a:r>
               <a:rPr lang="en-US" sz="3600" noProof="1"/>
-              <a:t>Scop: reducerea tremuratului (jitter) din filmări monoculare handheld prin estimarea și filtrarea traiectoriei camerei. Metodă: detectare colțuri (Shi–Tomasi), urmărire optică (Lucas–Kanade piramidal), estimare transform afină cu RANSAC, netezire (medie mobilă) a traiectoriei cumulative și aplicare transform invers pentru compensare. Implementare: backend Flask + OpenCV, interfață web (upload, parametri window/crop/overlay/side‑by‑side). Rezultat: scădere a variației frame‑to‑frame a deplasărilor cu ~&lt;…&gt;% și îmbunătățire vizuală fără distorsiuni majore.</a:t>
+              <a:t>Scop: reducerea tremuratului (jitter) din filmări monoculare handheld prin estimarea și filtrarea traiectoriei camerei. Metodă: detectare colțuri (Shi–Tomasi), urmărire optică (Lucas–Kanade piramidal), estimare transform afină cu RANSAC, netezire (medie mobilă) a traiectoriei cumulative și aplicare transform invers pentru compensare. Implementare: backend Flask + OpenCV, interfață web (upload, parametri window/crop/overlay/side‑by‑side). Rezultat: scădere a variației frame‑to‑frame a deplasărilor cu o medie de 30% și îmbunătățire vizuală fără distorsiuni majore.</a:t>
             </a:r>
           </a:p>
         </p:txBody>
@@ -6157,7 +6150,7 @@
         <p:spPr bwMode="auto">
           <a:xfrm>
             <a:off x="20178184" y="27637946"/>
-            <a:ext cx="8407576" cy="6999251"/>
+            <a:ext cx="8407576" cy="8107247"/>
           </a:xfrm>
           <a:prstGeom prst="rect">
             <a:avLst/>
@@ -6279,7 +6272,22 @@
           <a:p>
             <a:r>
               <a:rPr lang="en-US" sz="3600" noProof="1"/>
-              <a:t>Pipeline-ul atinge obiectivul: reducere semnificativă a jitter-ului cu cost computațional moderat și fără deformări evidente. Structura modulară permite integrarea rapidă a unor modele mai complexe (homografie, multi‑plan). Exportul de statistici oferă trasabilitate și bază pentru monitorizarea calității. Direcții: smoothing avansat, fallback dinamic affine/homography, optimizare performanță.</a:t>
+              <a:t>Pipeline-ul atinge obiectivul: reducere semnificativă a jitter-ului cu cost computațional moderat și fără deformări evidente. Structura modulară permite integrarea rapidă a unor modele mai complexe (homografie, multi‑plan). Exportul de statistici oferă trasabilitate și bază pentru monitorizarea calității. </a:t>
+            </a:r>
+          </a:p>
+          <a:p>
+            <a:endParaRPr lang="en-US" sz="3600" noProof="1"/>
+          </a:p>
+          <a:p>
+            <a:r>
+              <a:rPr lang="en-US" sz="3600" noProof="1"/>
+              <a:t>Direcții viitoare si imbunatatiri ulterioare</a:t>
+            </a:r>
+          </a:p>
+          <a:p>
+            <a:r>
+              <a:rPr lang="en-US" sz="3600" noProof="1"/>
+              <a:t>smoothing avansat, fallback dinamic affine/homography, optimizare performanță.</a:t>
             </a:r>
           </a:p>
         </p:txBody>
